--- a/gyeongsan/GSJOB2_5_마무리_설문_취업상담.pptx
+++ b/gyeongsan/GSJOB2_5_마무리_설문_취업상담.pptx
@@ -3107,7 +3107,7 @@
             <a:avLst/>
           </a:prstGeom>
           <a:solidFill>
-            <a:srgbClr val="F1F7F5"/>
+            <a:srgbClr val="F2F5F9"/>
           </a:solidFill>
           <a:ln>
             <a:noFill/>
@@ -3227,7 +3227,7 @@
             <a:avLst/>
           </a:prstGeom>
           <a:solidFill>
-            <a:srgbClr val="EEF5F2"/>
+            <a:srgbClr val="EFF3F8"/>
           </a:solidFill>
           <a:ln>
             <a:noFill/>
@@ -3317,7 +3317,7 @@
             <a:avLst/>
           </a:prstGeom>
           <a:solidFill>
-            <a:srgbClr val="E1EEE9"/>
+            <a:srgbClr val="E3EAF3"/>
           </a:solidFill>
           <a:ln>
             <a:noFill/>
@@ -3422,7 +3422,7 @@
             <a:r>
               <a:rPr sz="2400" b="1" spc="120">
                 <a:solidFill>
-                  <a:srgbClr val="1E7F5B"/>
+                  <a:srgbClr val="2B5FA8"/>
                 </a:solidFill>
                 <a:latin typeface="Pretendard"/>
                 <a:ea typeface="Pretendard"/>
@@ -3625,7 +3625,7 @@
             <a:avLst/>
           </a:prstGeom>
           <a:solidFill>
-            <a:srgbClr val="F3F8F6"/>
+            <a:srgbClr val="F4F7FA"/>
           </a:solidFill>
           <a:ln>
             <a:noFill/>
@@ -3730,7 +3730,7 @@
             <a:r>
               <a:rPr sz="1950" b="1" spc="160">
                 <a:solidFill>
-                  <a:srgbClr val="1E7F5B"/>
+                  <a:srgbClr val="2B5FA8"/>
                 </a:solidFill>
                 <a:latin typeface="Pretendard"/>
                 <a:ea typeface="Pretendard"/>
@@ -3827,7 +3827,7 @@
             <a:avLst/>
           </a:prstGeom>
           <a:solidFill>
-            <a:srgbClr val="C3E6D8"/>
+            <a:srgbClr val="C9DAF2"/>
           </a:solidFill>
           <a:ln>
             <a:noFill/>
@@ -3872,7 +3872,7 @@
             <a:r>
               <a:rPr sz="1950" b="1">
                 <a:solidFill>
-                  <a:srgbClr val="1E7F5B"/>
+                  <a:srgbClr val="2B5FA8"/>
                 </a:solidFill>
                 <a:latin typeface="Pretendard"/>
                 <a:ea typeface="Pretendard"/>
@@ -3898,7 +3898,7 @@
             <a:avLst/>
           </a:prstGeom>
           <a:solidFill>
-            <a:srgbClr val="1E7F5B"/>
+            <a:srgbClr val="2B5FA8"/>
           </a:solidFill>
           <a:ln>
             <a:noFill/>
@@ -4048,7 +4048,7 @@
             <a:r>
               <a:rPr sz="1500" b="1" spc="120">
                 <a:solidFill>
-                  <a:srgbClr val="1E7F5B"/>
+                  <a:srgbClr val="2B5FA8"/>
                 </a:solidFill>
                 <a:latin typeface="Pretendard"/>
                 <a:ea typeface="Pretendard"/>
@@ -4130,7 +4130,7 @@
             <a:r>
               <a:rPr sz="1950" b="1">
                 <a:solidFill>
-                  <a:srgbClr val="1E7F5B"/>
+                  <a:srgbClr val="2B5FA8"/>
                 </a:solidFill>
                 <a:latin typeface="Pretendard"/>
                 <a:ea typeface="Pretendard"/>
@@ -4156,7 +4156,7 @@
             <a:avLst/>
           </a:prstGeom>
           <a:solidFill>
-            <a:srgbClr val="1E7F5B"/>
+            <a:srgbClr val="2B5FA8"/>
           </a:solidFill>
           <a:ln>
             <a:noFill/>
@@ -4306,7 +4306,7 @@
             <a:r>
               <a:rPr sz="1500" b="1" spc="120">
                 <a:solidFill>
-                  <a:srgbClr val="1E7F5B"/>
+                  <a:srgbClr val="2B5FA8"/>
                 </a:solidFill>
                 <a:latin typeface="Pretendard"/>
                 <a:ea typeface="Pretendard"/>
@@ -4388,7 +4388,7 @@
             <a:r>
               <a:rPr sz="1950" b="1">
                 <a:solidFill>
-                  <a:srgbClr val="1E7F5B"/>
+                  <a:srgbClr val="2B5FA8"/>
                 </a:solidFill>
                 <a:latin typeface="Pretendard"/>
                 <a:ea typeface="Pretendard"/>
@@ -4414,7 +4414,7 @@
             <a:avLst/>
           </a:prstGeom>
           <a:solidFill>
-            <a:srgbClr val="1E7F5B"/>
+            <a:srgbClr val="2B5FA8"/>
           </a:solidFill>
           <a:ln>
             <a:noFill/>
@@ -4564,7 +4564,7 @@
             <a:r>
               <a:rPr sz="1500" b="1" spc="120">
                 <a:solidFill>
-                  <a:srgbClr val="1E7F5B"/>
+                  <a:srgbClr val="2B5FA8"/>
                 </a:solidFill>
                 <a:latin typeface="Pretendard"/>
                 <a:ea typeface="Pretendard"/>
@@ -4646,7 +4646,7 @@
             <a:r>
               <a:rPr sz="1950" b="1">
                 <a:solidFill>
-                  <a:srgbClr val="1E7F5B"/>
+                  <a:srgbClr val="2B5FA8"/>
                 </a:solidFill>
                 <a:latin typeface="Pretendard"/>
                 <a:ea typeface="Pretendard"/>
@@ -4672,7 +4672,7 @@
             <a:avLst/>
           </a:prstGeom>
           <a:solidFill>
-            <a:srgbClr val="1E7F5B"/>
+            <a:srgbClr val="2B5FA8"/>
           </a:solidFill>
           <a:ln>
             <a:noFill/>
@@ -4822,7 +4822,7 @@
             <a:r>
               <a:rPr sz="1500" b="1" spc="120">
                 <a:solidFill>
-                  <a:srgbClr val="1E7F5B"/>
+                  <a:srgbClr val="2B5FA8"/>
                 </a:solidFill>
                 <a:latin typeface="Pretendard"/>
                 <a:ea typeface="Pretendard"/>
@@ -5019,7 +5019,7 @@
             <a:avLst/>
           </a:prstGeom>
           <a:solidFill>
-            <a:srgbClr val="F3F8F6"/>
+            <a:srgbClr val="F4F7FA"/>
           </a:solidFill>
           <a:ln>
             <a:noFill/>
@@ -5124,7 +5124,7 @@
             <a:r>
               <a:rPr sz="1950" b="1" spc="160">
                 <a:solidFill>
-                  <a:srgbClr val="1E7F5B"/>
+                  <a:srgbClr val="2B5FA8"/>
                 </a:solidFill>
                 <a:latin typeface="Pretendard"/>
                 <a:ea typeface="Pretendard"/>
@@ -5460,7 +5460,7 @@
             <a:avLst/>
           </a:prstGeom>
           <a:solidFill>
-            <a:srgbClr val="1E7F5B"/>
+            <a:srgbClr val="2B5FA8"/>
           </a:solidFill>
           <a:ln>
             <a:noFill/>
@@ -5788,7 +5788,7 @@
             <a:avLst/>
           </a:prstGeom>
           <a:solidFill>
-            <a:srgbClr val="1E7F5B"/>
+            <a:srgbClr val="2B5FA8"/>
           </a:solidFill>
           <a:ln>
             <a:noFill/>
@@ -6048,7 +6048,7 @@
             <a:avLst/>
           </a:prstGeom>
           <a:solidFill>
-            <a:srgbClr val="F3F8F6"/>
+            <a:srgbClr val="F4F7FA"/>
           </a:solidFill>
           <a:ln>
             <a:noFill/>
@@ -6153,7 +6153,7 @@
             <a:r>
               <a:rPr sz="1950" b="1" spc="160">
                 <a:solidFill>
-                  <a:srgbClr val="1E7F5B"/>
+                  <a:srgbClr val="2B5FA8"/>
                 </a:solidFill>
                 <a:latin typeface="Pretendard"/>
                 <a:ea typeface="Pretendard"/>
@@ -6836,11 +6836,11 @@
             </a:avLst>
           </a:prstGeom>
           <a:solidFill>
-            <a:srgbClr val="E6F4EE"/>
+            <a:srgbClr val="EAF0F8"/>
           </a:solidFill>
           <a:ln w="9525">
             <a:solidFill>
-              <a:srgbClr val="C3E6D8"/>
+              <a:srgbClr val="C9DAF2"/>
             </a:solidFill>
           </a:ln>
           <a:effectLst/>
@@ -7039,7 +7039,7 @@
             <a:avLst/>
           </a:prstGeom>
           <a:solidFill>
-            <a:srgbClr val="F3F8F6"/>
+            <a:srgbClr val="F4F7FA"/>
           </a:solidFill>
           <a:ln>
             <a:noFill/>
@@ -7144,7 +7144,7 @@
             <a:r>
               <a:rPr sz="2400" b="1">
                 <a:solidFill>
-                  <a:srgbClr val="1E7F5B"/>
+                  <a:srgbClr val="2B5FA8"/>
                 </a:solidFill>
                 <a:latin typeface="Pretendard"/>
                 <a:ea typeface="Pretendard"/>
@@ -7301,7 +7301,7 @@
             <a:r>
               <a:rPr sz="2475" b="1">
                 <a:solidFill>
-                  <a:srgbClr val="1E7F5B"/>
+                  <a:srgbClr val="2B5FA8"/>
                 </a:solidFill>
                 <a:latin typeface="Pretendard"/>
                 <a:ea typeface="Pretendard"/>
@@ -7417,7 +7417,7 @@
             <a:r>
               <a:rPr sz="2475" b="1">
                 <a:solidFill>
-                  <a:srgbClr val="1E7F5B"/>
+                  <a:srgbClr val="2B5FA8"/>
                 </a:solidFill>
                 <a:latin typeface="Pretendard"/>
                 <a:ea typeface="Pretendard"/>
@@ -7533,7 +7533,7 @@
             <a:r>
               <a:rPr sz="2475" b="1">
                 <a:solidFill>
-                  <a:srgbClr val="1E7F5B"/>
+                  <a:srgbClr val="2B5FA8"/>
                 </a:solidFill>
                 <a:latin typeface="Pretendard"/>
                 <a:ea typeface="Pretendard"/>
@@ -7649,7 +7649,7 @@
             <a:r>
               <a:rPr sz="2475" b="1">
                 <a:solidFill>
-                  <a:srgbClr val="1E7F5B"/>
+                  <a:srgbClr val="2B5FA8"/>
                 </a:solidFill>
                 <a:latin typeface="Pretendard"/>
                 <a:ea typeface="Pretendard"/>
@@ -7716,7 +7716,7 @@
             <a:avLst/>
           </a:prstGeom>
           <a:solidFill>
-            <a:srgbClr val="1E7F5B"/>
+            <a:srgbClr val="2B5FA8"/>
           </a:solidFill>
           <a:ln>
             <a:noFill/>
@@ -7761,7 +7761,7 @@
             <a:r>
               <a:rPr sz="1800" b="1" spc="140">
                 <a:solidFill>
-                  <a:srgbClr val="1E7F5B"/>
+                  <a:srgbClr val="2B5FA8"/>
                 </a:solidFill>
                 <a:latin typeface="Pretendard"/>
                 <a:ea typeface="Pretendard"/>
